--- a/In Christ Alone (C)-CH.pptx
+++ b/In Christ Alone (C)-CH.pptx
@@ -267,7 +267,7 @@
           <a:p>
             <a:fld id="{E759A0DE-F190-5444-87AC-4719D5F20D15}" type="datetimeFigureOut">
               <a:rPr lang="en-US" smtClean="0"/>
-              <a:t>9/24/26</a:t>
+              <a:t>9/26/26</a:t>
             </a:fld>
             <a:endParaRPr lang="en-US"/>
           </a:p>
@@ -465,7 +465,7 @@
           <a:p>
             <a:fld id="{E759A0DE-F190-5444-87AC-4719D5F20D15}" type="datetimeFigureOut">
               <a:rPr lang="en-US" smtClean="0"/>
-              <a:t>9/24/26</a:t>
+              <a:t>9/26/26</a:t>
             </a:fld>
             <a:endParaRPr lang="en-US"/>
           </a:p>
@@ -673,7 +673,7 @@
           <a:p>
             <a:fld id="{E759A0DE-F190-5444-87AC-4719D5F20D15}" type="datetimeFigureOut">
               <a:rPr lang="en-US" smtClean="0"/>
-              <a:t>9/24/26</a:t>
+              <a:t>9/26/26</a:t>
             </a:fld>
             <a:endParaRPr lang="en-US"/>
           </a:p>
@@ -871,7 +871,7 @@
           <a:p>
             <a:fld id="{E759A0DE-F190-5444-87AC-4719D5F20D15}" type="datetimeFigureOut">
               <a:rPr lang="en-US" smtClean="0"/>
-              <a:t>9/24/26</a:t>
+              <a:t>9/26/26</a:t>
             </a:fld>
             <a:endParaRPr lang="en-US"/>
           </a:p>
@@ -1146,7 +1146,7 @@
           <a:p>
             <a:fld id="{E759A0DE-F190-5444-87AC-4719D5F20D15}" type="datetimeFigureOut">
               <a:rPr lang="en-US" smtClean="0"/>
-              <a:t>9/24/26</a:t>
+              <a:t>9/26/26</a:t>
             </a:fld>
             <a:endParaRPr lang="en-US"/>
           </a:p>
@@ -1411,7 +1411,7 @@
           <a:p>
             <a:fld id="{E759A0DE-F190-5444-87AC-4719D5F20D15}" type="datetimeFigureOut">
               <a:rPr lang="en-US" smtClean="0"/>
-              <a:t>9/24/26</a:t>
+              <a:t>9/26/26</a:t>
             </a:fld>
             <a:endParaRPr lang="en-US"/>
           </a:p>
@@ -1823,7 +1823,7 @@
           <a:p>
             <a:fld id="{E759A0DE-F190-5444-87AC-4719D5F20D15}" type="datetimeFigureOut">
               <a:rPr lang="en-US" smtClean="0"/>
-              <a:t>9/24/26</a:t>
+              <a:t>9/26/26</a:t>
             </a:fld>
             <a:endParaRPr lang="en-US"/>
           </a:p>
@@ -1964,7 +1964,7 @@
           <a:p>
             <a:fld id="{E759A0DE-F190-5444-87AC-4719D5F20D15}" type="datetimeFigureOut">
               <a:rPr lang="en-US" smtClean="0"/>
-              <a:t>9/24/26</a:t>
+              <a:t>9/26/26</a:t>
             </a:fld>
             <a:endParaRPr lang="en-US"/>
           </a:p>
@@ -2077,7 +2077,7 @@
           <a:p>
             <a:fld id="{E759A0DE-F190-5444-87AC-4719D5F20D15}" type="datetimeFigureOut">
               <a:rPr lang="en-US" smtClean="0"/>
-              <a:t>9/24/26</a:t>
+              <a:t>9/26/26</a:t>
             </a:fld>
             <a:endParaRPr lang="en-US"/>
           </a:p>
@@ -2388,7 +2388,7 @@
           <a:p>
             <a:fld id="{E759A0DE-F190-5444-87AC-4719D5F20D15}" type="datetimeFigureOut">
               <a:rPr lang="en-US" smtClean="0"/>
-              <a:t>9/24/26</a:t>
+              <a:t>9/26/26</a:t>
             </a:fld>
             <a:endParaRPr lang="en-US"/>
           </a:p>
@@ -2676,7 +2676,7 @@
           <a:p>
             <a:fld id="{E759A0DE-F190-5444-87AC-4719D5F20D15}" type="datetimeFigureOut">
               <a:rPr lang="en-US" smtClean="0"/>
-              <a:t>9/24/26</a:t>
+              <a:t>9/26/26</a:t>
             </a:fld>
             <a:endParaRPr lang="en-US"/>
           </a:p>
@@ -2917,7 +2917,7 @@
           <a:p>
             <a:fld id="{E759A0DE-F190-5444-87AC-4719D5F20D15}" type="datetimeFigureOut">
               <a:rPr lang="en-US" smtClean="0"/>
-              <a:t>9/24/26</a:t>
+              <a:t>9/26/26</a:t>
             </a:fld>
             <a:endParaRPr lang="en-US"/>
           </a:p>
@@ -3899,6 +3899,39 @@
           <a:lstStyle/>
           <a:p>
             <a:pPr algn="l"/>
+            <a:r>
+              <a:rPr lang="en-US" sz="3600" dirty="0">
+                <a:solidFill>
+                  <a:srgbClr val="FFFF00"/>
+                </a:solidFill>
+                <a:latin typeface="Avenir Medium" panose="02000503020000020003" pitchFamily="2" charset="0"/>
+                <a:ea typeface="Bodoni Ornaments" pitchFamily="2" charset="0"/>
+              </a:rPr>
+              <a:t>CAPO at 2</a:t>
+            </a:r>
+            <a:r>
+              <a:rPr lang="en-US" sz="3600" baseline="30000" dirty="0">
+                <a:solidFill>
+                  <a:srgbClr val="FFFF00"/>
+                </a:solidFill>
+                <a:latin typeface="Avenir Medium" panose="02000503020000020003" pitchFamily="2" charset="0"/>
+                <a:ea typeface="Bodoni Ornaments" pitchFamily="2" charset="0"/>
+              </a:rPr>
+              <a:t>nd</a:t>
+            </a:r>
+            <a:r>
+              <a:rPr lang="en-US" sz="3600" dirty="0">
+                <a:solidFill>
+                  <a:srgbClr val="FFFF00"/>
+                </a:solidFill>
+                <a:latin typeface="Avenir Medium" panose="02000503020000020003" pitchFamily="2" charset="0"/>
+                <a:ea typeface="Bodoni Ornaments" pitchFamily="2" charset="0"/>
+              </a:rPr>
+              <a:t> (D)</a:t>
+            </a:r>
+          </a:p>
+          <a:p>
+            <a:pPr algn="l"/>
             <a:endParaRPr lang="en-US" sz="3600" dirty="0">
               <a:solidFill>
                 <a:srgbClr val="FFFF00"/>
@@ -4182,7 +4215,7 @@
                 <a:latin typeface="Avenir Medium" panose="02000503020000020003" pitchFamily="2" charset="0"/>
                 <a:ea typeface="Bodoni Ornaments" pitchFamily="2" charset="0"/>
               </a:rPr>
-              <a:t>C                 F          G           C             C    F   Am   F</a:t>
+              <a:t>C                 F          G           C             C    </a:t>
             </a:r>
           </a:p>
           <a:p>
@@ -4566,7 +4599,7 @@
                 <a:latin typeface="Avenir Medium" panose="02000503020000020003" pitchFamily="2" charset="0"/>
                 <a:ea typeface="Bodoni Ornaments" pitchFamily="2" charset="0"/>
               </a:rPr>
-              <a:t>C                 F            G           C             C    F   Am   F</a:t>
+              <a:t>C                 F            G           C             C    </a:t>
             </a:r>
           </a:p>
           <a:p>
@@ -4957,7 +4990,7 @@
                 <a:latin typeface="Avenir Medium" panose="02000503020000020003" pitchFamily="2" charset="0"/>
                 <a:ea typeface="Bodoni Ornaments" pitchFamily="2" charset="0"/>
               </a:rPr>
-              <a:t>C                        F             G             C        C    F   Am   F</a:t>
+              <a:t>C                        F             G             C        C    </a:t>
             </a:r>
           </a:p>
           <a:p>
@@ -5374,7 +5407,7 @@
         <p:spPr>
           <a:xfrm>
             <a:off x="9399731" y="6059270"/>
-            <a:ext cx="2616422" cy="646331"/>
+            <a:ext cx="2135521" cy="646331"/>
           </a:xfrm>
           <a:prstGeom prst="rect">
             <a:avLst/>
@@ -5388,12 +5421,20 @@
           <a:lstStyle/>
           <a:p>
             <a:r>
+              <a:rPr lang="en-US" sz="3600" b="1">
+                <a:solidFill>
+                  <a:schemeClr val="bg1"/>
+                </a:solidFill>
+              </a:rPr>
+              <a:t>X2 &amp; </a:t>
+            </a:r>
+            <a:r>
               <a:rPr lang="en-US" sz="3600" b="1" dirty="0">
                 <a:solidFill>
                   <a:schemeClr val="bg1"/>
                 </a:solidFill>
               </a:rPr>
-              <a:t>X2 and END</a:t>
+              <a:t>END</a:t>
             </a:r>
           </a:p>
         </p:txBody>
